--- a/media/exports/reports/2026-07/growth-trades.pptx
+++ b/media/exports/reports/2026-07/growth-trades.pptx
@@ -240,70 +240,70 @@
                 <c:formatCode>$#,##0;[Red]($#,##0);"-"</c:formatCode>
                 <c:ptCount val="22"/>
                 <c:pt idx="0">
-                  <c:v>171009</c:v>
+                  <c:v>191014</c:v>
                 </c:pt>
                 <c:pt idx="1">
-                  <c:v>179474</c:v>
+                  <c:v>200124</c:v>
                 </c:pt>
                 <c:pt idx="2">
-                  <c:v>143156</c:v>
+                  <c:v>159406</c:v>
                 </c:pt>
                 <c:pt idx="3">
-                  <c:v>140909</c:v>
+                  <c:v>156794</c:v>
                 </c:pt>
                 <c:pt idx="4">
-                  <c:v>160943</c:v>
+                  <c:v>179190</c:v>
                 </c:pt>
                 <c:pt idx="5">
-                  <c:v>135082</c:v>
+                  <c:v>150465</c:v>
                 </c:pt>
                 <c:pt idx="6">
-                  <c:v>124705</c:v>
+                  <c:v>138865</c:v>
                 </c:pt>
                 <c:pt idx="7">
-                  <c:v>129816</c:v>
+                  <c:v>144649</c:v>
                 </c:pt>
                 <c:pt idx="8">
-                  <c:v>164113</c:v>
+                  <c:v>183265</c:v>
                 </c:pt>
                 <c:pt idx="9">
-                  <c:v>186760</c:v>
+                  <c:v>208588</c:v>
                 </c:pt>
                 <c:pt idx="10">
-                  <c:v>139164</c:v>
+                  <c:v>155118</c:v>
                 </c:pt>
                 <c:pt idx="11">
-                  <c:v>128255</c:v>
+                  <c:v>143077</c:v>
                 </c:pt>
                 <c:pt idx="12">
-                  <c:v>128898</c:v>
+                  <c:v>143566</c:v>
                 </c:pt>
                 <c:pt idx="13">
-                  <c:v>174786</c:v>
+                  <c:v>194966</c:v>
                 </c:pt>
                 <c:pt idx="14">
-                  <c:v>135079</c:v>
+                  <c:v>150283</c:v>
                 </c:pt>
                 <c:pt idx="15">
-                  <c:v>164780</c:v>
+                  <c:v>183306</c:v>
                 </c:pt>
                 <c:pt idx="16">
-                  <c:v>196372</c:v>
+                  <c:v>218908</c:v>
                 </c:pt>
                 <c:pt idx="17">
-                  <c:v>191500</c:v>
+                  <c:v>213578</c:v>
                 </c:pt>
                 <c:pt idx="18">
-                  <c:v>164987</c:v>
+                  <c:v>183967</c:v>
                 </c:pt>
                 <c:pt idx="19">
-                  <c:v>161963</c:v>
+                  <c:v>180342</c:v>
                 </c:pt>
                 <c:pt idx="20">
-                  <c:v>173163</c:v>
+                  <c:v>193032</c:v>
                 </c:pt>
                 <c:pt idx="21">
-                  <c:v>193245</c:v>
+                  <c:v>215610</c:v>
                 </c:pt>
               </c:numCache>
             </c:numRef>
@@ -540,70 +540,70 @@
                 <c:formatCode>$#,##0;[Red]($#,##0);"-"</c:formatCode>
                 <c:ptCount val="22"/>
                 <c:pt idx="0">
-                  <c:v>24670</c:v>
+                  <c:v>27650</c:v>
                 </c:pt>
                 <c:pt idx="1">
-                  <c:v>24670</c:v>
+                  <c:v>27650</c:v>
                 </c:pt>
                 <c:pt idx="2">
-                  <c:v>24670</c:v>
+                  <c:v>27650</c:v>
                 </c:pt>
                 <c:pt idx="3">
-                  <c:v>24670</c:v>
+                  <c:v>27650</c:v>
                 </c:pt>
                 <c:pt idx="4">
-                  <c:v>27930</c:v>
+                  <c:v>31300</c:v>
                 </c:pt>
                 <c:pt idx="5">
-                  <c:v>27930</c:v>
+                  <c:v>31300</c:v>
                 </c:pt>
                 <c:pt idx="6">
-                  <c:v>27930</c:v>
+                  <c:v>31300</c:v>
                 </c:pt>
                 <c:pt idx="7">
-                  <c:v>27930</c:v>
+                  <c:v>31300</c:v>
                 </c:pt>
                 <c:pt idx="8">
-                  <c:v>31870</c:v>
+                  <c:v>35720</c:v>
                 </c:pt>
                 <c:pt idx="9">
-                  <c:v>33200</c:v>
+                  <c:v>37200</c:v>
                 </c:pt>
                 <c:pt idx="10">
-                  <c:v>33200</c:v>
+                  <c:v>37200</c:v>
                 </c:pt>
                 <c:pt idx="11">
-                  <c:v>33200</c:v>
+                  <c:v>37200</c:v>
                 </c:pt>
                 <c:pt idx="12">
-                  <c:v>35800</c:v>
+                  <c:v>40100</c:v>
                 </c:pt>
                 <c:pt idx="13">
-                  <c:v>35800</c:v>
+                  <c:v>40100</c:v>
                 </c:pt>
                 <c:pt idx="14">
-                  <c:v>35800</c:v>
+                  <c:v>40100</c:v>
                 </c:pt>
                 <c:pt idx="15">
-                  <c:v>35800</c:v>
+                  <c:v>40100</c:v>
                 </c:pt>
                 <c:pt idx="16">
-                  <c:v>37500</c:v>
+                  <c:v>42000</c:v>
                 </c:pt>
                 <c:pt idx="17">
-                  <c:v>37500</c:v>
+                  <c:v>42000</c:v>
                 </c:pt>
                 <c:pt idx="18">
-                  <c:v>37500</c:v>
+                  <c:v>42000</c:v>
                 </c:pt>
                 <c:pt idx="19">
-                  <c:v>40500</c:v>
+                  <c:v>45350</c:v>
                 </c:pt>
                 <c:pt idx="20">
-                  <c:v>40500</c:v>
+                  <c:v>45350</c:v>
                 </c:pt>
                 <c:pt idx="21">
-                  <c:v>40500</c:v>
+                  <c:v>45350</c:v>
                 </c:pt>
               </c:numCache>
             </c:numRef>
@@ -840,70 +840,70 @@
                 <c:formatCode>$#,##0;[Red]($#,##0);"-"</c:formatCode>
                 <c:ptCount val="22"/>
                 <c:pt idx="0">
+                  <c:v>141600</c:v>
+                </c:pt>
+                <c:pt idx="1">
+                  <c:v>147100</c:v>
+                </c:pt>
+                <c:pt idx="2">
+                  <c:v>103700</c:v>
+                </c:pt>
+                <c:pt idx="3">
+                  <c:v>100100</c:v>
+                </c:pt>
+                <c:pt idx="4">
+                  <c:v>118600</c:v>
+                </c:pt>
+                <c:pt idx="5">
+                  <c:v>96400</c:v>
+                </c:pt>
+                <c:pt idx="6">
+                  <c:v>83900</c:v>
+                </c:pt>
+                <c:pt idx="7">
+                  <c:v>89900</c:v>
+                </c:pt>
+                <c:pt idx="8">
                   <c:v>126300</c:v>
                 </c:pt>
-                <c:pt idx="1">
-                  <c:v>131400</c:v>
-                </c:pt>
-                <c:pt idx="2">
-                  <c:v>92600</c:v>
-                </c:pt>
-                <c:pt idx="3">
-                  <c:v>89400</c:v>
-                </c:pt>
-                <c:pt idx="4">
-                  <c:v>106000</c:v>
-                </c:pt>
-                <c:pt idx="5">
-                  <c:v>86100</c:v>
-                </c:pt>
-                <c:pt idx="6">
-                  <c:v>74900</c:v>
-                </c:pt>
-                <c:pt idx="7">
-                  <c:v>80300</c:v>
-                </c:pt>
-                <c:pt idx="8">
-                  <c:v>112700</c:v>
-                </c:pt>
                 <c:pt idx="9">
-                  <c:v>135800</c:v>
+                  <c:v>152100</c:v>
                 </c:pt>
                 <c:pt idx="10">
-                  <c:v>86200</c:v>
+                  <c:v>96500</c:v>
                 </c:pt>
                 <c:pt idx="11">
-                  <c:v>75100</c:v>
+                  <c:v>84200</c:v>
                 </c:pt>
                 <c:pt idx="12">
-                  <c:v>70800</c:v>
+                  <c:v>79300</c:v>
                 </c:pt>
                 <c:pt idx="13">
-                  <c:v>113300</c:v>
+                  <c:v>126900</c:v>
                 </c:pt>
                 <c:pt idx="14">
-                  <c:v>69700</c:v>
+                  <c:v>78100</c:v>
                 </c:pt>
                 <c:pt idx="15">
-                  <c:v>97500</c:v>
+                  <c:v>109100</c:v>
                 </c:pt>
                 <c:pt idx="16">
-                  <c:v>129300</c:v>
+                  <c:v>144800</c:v>
                 </c:pt>
                 <c:pt idx="17">
-                  <c:v>129400</c:v>
+                  <c:v>144900</c:v>
                 </c:pt>
                 <c:pt idx="18">
-                  <c:v>104400</c:v>
+                  <c:v>116900</c:v>
                 </c:pt>
                 <c:pt idx="19">
-                  <c:v>92400</c:v>
+                  <c:v>103400</c:v>
                 </c:pt>
                 <c:pt idx="20">
-                  <c:v>103200</c:v>
+                  <c:v>115600</c:v>
                 </c:pt>
                 <c:pt idx="21">
-                  <c:v>127600</c:v>
+                  <c:v>143000</c:v>
                 </c:pt>
               </c:numCache>
             </c:numRef>
@@ -952,7 +952,7 @@
         <c:axId val="-2100718248"/>
         <c:scaling>
           <c:orientation val="minMax"/>
-          <c:max val="150000.0"/>
+          <c:max val="200000.0"/>
           <c:min val="0.0"/>
         </c:scaling>
         <c:delete val="0"/>
@@ -1140,70 +1140,70 @@
                 <c:formatCode>$#,##0;[Red]($#,##0);"-"</c:formatCode>
                 <c:ptCount val="22"/>
                 <c:pt idx="0">
-                  <c:v>20039</c:v>
+                  <c:v>21764</c:v>
                 </c:pt>
                 <c:pt idx="1">
-                  <c:v>23404</c:v>
+                  <c:v>25374</c:v>
                 </c:pt>
                 <c:pt idx="2">
-                  <c:v>25886</c:v>
+                  <c:v>28056</c:v>
                 </c:pt>
                 <c:pt idx="3">
-                  <c:v>26839</c:v>
+                  <c:v>29044</c:v>
                 </c:pt>
                 <c:pt idx="4">
-                  <c:v>27013</c:v>
+                  <c:v>29290</c:v>
                 </c:pt>
                 <c:pt idx="5">
-                  <c:v>21052</c:v>
+                  <c:v>22765</c:v>
                 </c:pt>
                 <c:pt idx="6">
-                  <c:v>21875</c:v>
+                  <c:v>23665</c:v>
                 </c:pt>
                 <c:pt idx="7">
-                  <c:v>21586</c:v>
+                  <c:v>23449</c:v>
                 </c:pt>
                 <c:pt idx="8">
-                  <c:v>19543</c:v>
+                  <c:v>21245</c:v>
                 </c:pt>
                 <c:pt idx="9">
-                  <c:v>17760</c:v>
+                  <c:v>19288</c:v>
                 </c:pt>
                 <c:pt idx="10">
-                  <c:v>19764</c:v>
+                  <c:v>21418</c:v>
                 </c:pt>
                 <c:pt idx="11">
-                  <c:v>19955</c:v>
+                  <c:v>21677</c:v>
                 </c:pt>
                 <c:pt idx="12">
-                  <c:v>22298</c:v>
+                  <c:v>24166</c:v>
                 </c:pt>
                 <c:pt idx="13">
-                  <c:v>25686</c:v>
+                  <c:v>27966</c:v>
                 </c:pt>
                 <c:pt idx="14">
-                  <c:v>29579</c:v>
+                  <c:v>32083</c:v>
                 </c:pt>
                 <c:pt idx="15">
-                  <c:v>31480</c:v>
+                  <c:v>34106</c:v>
                 </c:pt>
                 <c:pt idx="16">
-                  <c:v>29572</c:v>
+                  <c:v>32108</c:v>
                 </c:pt>
                 <c:pt idx="17">
-                  <c:v>24600</c:v>
+                  <c:v>26678</c:v>
                 </c:pt>
                 <c:pt idx="18">
-                  <c:v>23087</c:v>
+                  <c:v>25067</c:v>
                 </c:pt>
                 <c:pt idx="19">
-                  <c:v>29063</c:v>
+                  <c:v>31592</c:v>
                 </c:pt>
                 <c:pt idx="20">
-                  <c:v>29463</c:v>
+                  <c:v>32082</c:v>
                 </c:pt>
                 <c:pt idx="21">
-                  <c:v>25145</c:v>
+                  <c:v>27260</c:v>
                 </c:pt>
               </c:numCache>
             </c:numRef>
@@ -1777,7 +1777,7 @@
           <a:lstStyle/>
           <a:p>
             <a:r>
-              <a:t>Trades · All. July against July last year: 3.5%; Year to date against the same period last year: 3.5%; Gross margin, year to date: 36.8%. Revenue is 3.5% up on the same period last year, year to date ($193,245 against $186,760). Maintenance contracts make the highest gross margin (59.5%); Installations the lowest (28.3%). The business needs 29.6% gross margin just to cover overheads. Installations: 28.3% gross margin, 6.7 points under the 35.0% target: about $8,580 on $127,600 of revenue this financial year to date. It's below the 29.6% needed to cover overheads, too. Maintenance contracts: 59.5% gross margin, 24.5 points over the 35.0% target ($9,941 ahead on $40,500 this financial year to date).</a:t>
+              <a:t>Trades · All. July against July last year: 3.4%; Year to date against the same period last year: 3.4%; Gross margin, year to date: 43.4%. Revenue is 3.4% up on the same period last year, year to date ($215,610 against $208,588). Maintenance contracts make the highest gross margin (63.9%); Installations the lowest (36.0%). The business needs 39.8% gross margin just to cover overheads. Installations: 36.0% gross margin, 1.0 points over the 35.0% target ($1,430 ahead on $143,000 this financial year to date). Maintenance contracts: 63.9% gross margin, 28.9 points over the 35.0% target ($13,094 ahead on $45,350 this financial year to date).</a:t>
             </a:r>
           </a:p>
         </p:txBody>
@@ -1847,7 +1847,7 @@
           <a:lstStyle/>
           <a:p>
             <a:r>
-              <a:t>Trades · Maintenance contracts. July against July last year: 22.0%; Year to date against the same period last year: 22.0%; Gross margin, year to date: 59.5%. Maintenance contracts brought in $40,500 this financial year to date, 22.0% on the same period last year (faster than the business as a whole, 3.5%), at a 59.5% gross margin (above the 36.8% overall). Maintenance contracts: 59.5% gross margin, 24.5 points over the 35.0% target ($9,941 ahead on $40,500 this financial year to date).</a:t>
+              <a:t>Trades · Maintenance contracts. July against July last year: 21.9%; Year to date against the same period last year: 21.9%; Gross margin, year to date: 63.9%. Maintenance contracts brought in $45,350 this financial year to date, 21.9% on the same period last year (faster than the business as a whole, 3.4%), at a 63.9% gross margin (above the 43.4% overall). Maintenance contracts: 63.9% gross margin, 28.9 points over the 35.0% target ($13,094 ahead on $45,350 this financial year to date).</a:t>
             </a:r>
           </a:p>
         </p:txBody>
@@ -1917,7 +1917,7 @@
           <a:lstStyle/>
           <a:p>
             <a:r>
-              <a:t>Trades · Installations. July against July last year: (6.0%); Year to date against the same period last year: (6.0%); Gross margin, year to date: 28.3%. Installations brought in $127,600 this financial year to date, (6.0%) on the same period last year (slower than the business as a whole, 3.5%), at a 28.3% gross margin (below the 36.8% overall). Installations: 28.3% gross margin, 6.7 points under the 35.0% target: about $8,580 on $127,600 of revenue this financial year to date. It's below the 29.6% needed to cover overheads, too.</a:t>
+              <a:t>Trades · Installations. July against July last year: (6.0%); Year to date against the same period last year: (6.0%); Gross margin, year to date: 36.0%. Installations brought in $143,000 this financial year to date, (6.0%) on the same period last year (slower than the business as a whole, 3.4%), at a 36.0% gross margin (below the 43.4% overall). Installations: 36.0% gross margin, 1.0 points over the 35.0% target ($1,430 ahead on $143,000 this financial year to date).</a:t>
             </a:r>
           </a:p>
         </p:txBody>
@@ -1987,7 +1987,7 @@
           <a:lstStyle/>
           <a:p>
             <a:r>
-              <a:t>Trades · Call-outs and repairs. July against July last year: 41.6%; Year to date against the same period last year: 41.6%; Gross margin, year to date: 43.4%. Call-outs and repairs brought in $25,145 this financial year to date, 41.6% on the same period last year (faster than the business as a whole, 3.5%), at a 43.4% gross margin (above the 36.8% overall). Call-outs and repairs: 43.4% gross margin, 8.4 points over the 35.0% target ($2,124 ahead on $25,145 this financial year to date).</a:t>
+              <a:t>Trades · Call-outs and repairs. July against July last year: 41.3%; Year to date against the same period last year: 41.3%; Gross margin, year to date: 47.8%. Call-outs and repairs brought in $27,260 this financial year to date, 41.3% on the same period last year (faster than the business as a whole, 3.4%), at a 47.8% gross margin (above the 43.4% overall). Call-outs and repairs: 47.8% gross margin, 12.8 points over the 35.0% target ($3,499 ahead on $27,260 this financial year to date).</a:t>
             </a:r>
           </a:p>
         </p:txBody>
@@ -2057,7 +2057,7 @@
           <a:lstStyle/>
           <a:p>
             <a:r>
-              <a:t>By line: financial year to date (Jul 2026) against the same period last year · Trades. From gross margin to profit: July's jobs made $71,121 gross margin (36.8%). Technician time not charged to jobs took ($2,214) and overheads $59,440, leaving $13,895 profit before tax (7.2% of revenue). To cover overheads, jobs need a 29.6% gross margin on average.</a:t>
+              <a:t>By line: financial year to date (Jul 2026) against the same period last year · Trades. From gross margin to profit: July's jobs made $93,486 gross margin (43.4%). Technician time not charged to jobs took $26,391 and overheads $59,440, leaving $7,655 profit before tax (3.6% of revenue). To cover overheads, jobs need a 39.8% gross margin on average.</a:t>
             </a:r>
           </a:p>
         </p:txBody>
@@ -5472,7 +5472,7 @@
                 </a:solidFill>
                 <a:latin typeface="Roboto"/>
               </a:rPr>
-              <a:t>Data retrieved 2pm, Tue 6 Oct 2026 · Generated 8 Oct 2026, 9:35am · Sample data · Made with Python (python-pptx)</a:t>
+              <a:t>Data retrieved 2pm, Tue 6 Oct 2026 · Generated 9 Oct 2026, 8:41am · Sample data · Made with Python (python-pptx)</a:t>
             </a:r>
           </a:p>
         </p:txBody>
@@ -5818,7 +5818,7 @@
                 </a:solidFill>
                 <a:latin typeface="Roboto"/>
               </a:rPr>
-              <a:t>3.5%</a:t>
+              <a:t>3.4%</a:t>
             </a:r>
           </a:p>
         </p:txBody>
@@ -5857,7 +5857,7 @@
                 </a:solidFill>
                 <a:latin typeface="Roboto"/>
               </a:rPr>
-              <a:t>$193,245 against $186,760</a:t>
+              <a:t>$215,610 against $208,588</a:t>
             </a:r>
           </a:p>
         </p:txBody>
@@ -5984,7 +5984,7 @@
                 </a:solidFill>
                 <a:latin typeface="Roboto"/>
               </a:rPr>
-              <a:t>3.5%</a:t>
+              <a:t>3.4%</a:t>
             </a:r>
           </a:p>
         </p:txBody>
@@ -6023,7 +6023,7 @@
                 </a:solidFill>
                 <a:latin typeface="Roboto"/>
               </a:rPr>
-              <a:t>$193,245 against $186,760</a:t>
+              <a:t>$215,610 against $208,588</a:t>
             </a:r>
           </a:p>
         </p:txBody>
@@ -6150,7 +6150,7 @@
                 </a:solidFill>
                 <a:latin typeface="Roboto"/>
               </a:rPr>
-              <a:t>36.8%</a:t>
+              <a:t>43.4%</a:t>
             </a:r>
           </a:p>
         </p:txBody>
@@ -6189,7 +6189,7 @@
                 </a:solidFill>
                 <a:latin typeface="Roboto"/>
               </a:rPr>
-              <a:t>$71,121 before overheads</a:t>
+              <a:t>$93,486 before overheads</a:t>
             </a:r>
           </a:p>
         </p:txBody>
@@ -6204,7 +6204,7 @@
         </p:nvGraphicFramePr>
         <p:xfrm>
           <a:off x="457200" y="2604516"/>
-          <a:ext cx="11277295" cy="2119884"/>
+          <a:ext cx="11277295" cy="2318004"/>
         </p:xfrm>
         <a:graphic>
           <a:graphicData uri="http://schemas.openxmlformats.org/drawingml/2006/chart">
@@ -6220,8 +6220,8 @@
         </p:nvSpPr>
         <p:spPr>
           <a:xfrm>
-            <a:off x="457200" y="4815840"/>
-            <a:ext cx="5501487" cy="1493520"/>
+            <a:off x="457200" y="5013960"/>
+            <a:ext cx="5501487" cy="1295400"/>
           </a:xfrm>
           <a:prstGeom prst="rect">
             <a:avLst/>
@@ -6269,7 +6269,7 @@
         </p:nvSpPr>
         <p:spPr>
           <a:xfrm>
-            <a:off x="594360" y="4870704"/>
+            <a:off x="594360" y="5068824"/>
             <a:ext cx="5227167" cy="274320"/>
           </a:xfrm>
           <a:prstGeom prst="rect">
@@ -6308,8 +6308,8 @@
         </p:nvSpPr>
         <p:spPr>
           <a:xfrm>
-            <a:off x="594360" y="5145024"/>
-            <a:ext cx="5227167" cy="1127760"/>
+            <a:off x="594360" y="5343144"/>
+            <a:ext cx="5227167" cy="929640"/>
           </a:xfrm>
           <a:prstGeom prst="rect">
             <a:avLst/>
@@ -6334,7 +6334,7 @@
                 </a:solidFill>
                 <a:latin typeface="Roboto"/>
               </a:rPr>
-              <a:t>Revenue is 3.5% up on the same period last year, year to date ($193,245 against $186,760). Maintenance contracts make the highest gross margin (59.5%); Installations the lowest (28.3%). The business needs 29.6% gross margin just to cover overheads.</a:t>
+              <a:t>Revenue is 3.4% up on the same period last year, year to date ($215,610 against $208,588). Maintenance contracts make the highest gross margin (63.9%); Installations the lowest (36.0%). The business needs 39.8% gross margin just to cover overheads.</a:t>
             </a:r>
           </a:p>
         </p:txBody>
@@ -6347,8 +6347,8 @@
         </p:nvSpPr>
         <p:spPr>
           <a:xfrm>
-            <a:off x="6233007" y="4815840"/>
-            <a:ext cx="5501487" cy="1493520"/>
+            <a:off x="6233007" y="5013960"/>
+            <a:ext cx="5501487" cy="1295400"/>
           </a:xfrm>
           <a:prstGeom prst="rect">
             <a:avLst/>
@@ -6396,7 +6396,7 @@
         </p:nvSpPr>
         <p:spPr>
           <a:xfrm>
-            <a:off x="6370167" y="4870704"/>
+            <a:off x="6370167" y="5068824"/>
             <a:ext cx="5227167" cy="274320"/>
           </a:xfrm>
           <a:prstGeom prst="rect">
@@ -6435,8 +6435,8 @@
         </p:nvSpPr>
         <p:spPr>
           <a:xfrm>
-            <a:off x="6370167" y="5145024"/>
-            <a:ext cx="5227167" cy="1127760"/>
+            <a:off x="6370167" y="5343144"/>
+            <a:ext cx="5227167" cy="929640"/>
           </a:xfrm>
           <a:prstGeom prst="rect">
             <a:avLst/>
@@ -6461,7 +6461,7 @@
                 </a:solidFill>
                 <a:latin typeface="Roboto"/>
               </a:rPr>
-              <a:t>Installations: 28.3% gross margin, 6.7 points under the 35.0% target: about $8,580 on $127,600 of revenue this financial year to date. It's below the 29.6% needed to cover overheads, too. Maintenance contracts: 59.5% gross margin, 24.5 points over the 35.0% target ($9,941 ahead on $40,500 this financial year to date).</a:t>
+              <a:t>Installations: 36.0% gross margin, 1.0 points over the 35.0% target ($1,430 ahead on $143,000 this financial year to date). Maintenance contracts: 63.9% gross margin, 28.9 points over the 35.0% target ($13,094 ahead on $45,350 this financial year to date).</a:t>
             </a:r>
           </a:p>
         </p:txBody>
@@ -6539,7 +6539,7 @@
                 </a:solidFill>
                 <a:latin typeface="Roboto"/>
               </a:rPr>
-              <a:t>Data retrieved 2pm, Tue 6 Oct 2026 · Generated 8 Oct 2026, 9:35am · Sample data · Made with Python (python-pptx)</a:t>
+              <a:t>Data retrieved 2pm, Tue 6 Oct 2026 · Generated 9 Oct 2026, 8:41am · Sample data · Made with Python (python-pptx)</a:t>
             </a:r>
           </a:p>
         </p:txBody>
@@ -6885,7 +6885,7 @@
                 </a:solidFill>
                 <a:latin typeface="Roboto"/>
               </a:rPr>
-              <a:t>22.0%</a:t>
+              <a:t>21.9%</a:t>
             </a:r>
           </a:p>
         </p:txBody>
@@ -6924,7 +6924,7 @@
                 </a:solidFill>
                 <a:latin typeface="Roboto"/>
               </a:rPr>
-              <a:t>$40,500 against $33,200</a:t>
+              <a:t>$45,350 against $37,200</a:t>
             </a:r>
           </a:p>
         </p:txBody>
@@ -7051,7 +7051,7 @@
                 </a:solidFill>
                 <a:latin typeface="Roboto"/>
               </a:rPr>
-              <a:t>22.0%</a:t>
+              <a:t>21.9%</a:t>
             </a:r>
           </a:p>
         </p:txBody>
@@ -7090,7 +7090,7 @@
                 </a:solidFill>
                 <a:latin typeface="Roboto"/>
               </a:rPr>
-              <a:t>$40,500 against $33,200</a:t>
+              <a:t>$45,350 against $37,200</a:t>
             </a:r>
           </a:p>
         </p:txBody>
@@ -7217,7 +7217,7 @@
                 </a:solidFill>
                 <a:latin typeface="Roboto"/>
               </a:rPr>
-              <a:t>59.5%</a:t>
+              <a:t>63.9%</a:t>
             </a:r>
           </a:p>
         </p:txBody>
@@ -7256,7 +7256,7 @@
                 </a:solidFill>
                 <a:latin typeface="Roboto"/>
               </a:rPr>
-              <a:t>$24,116 before overheads</a:t>
+              <a:t>$28,966 before overheads</a:t>
             </a:r>
           </a:p>
         </p:txBody>
@@ -7401,7 +7401,7 @@
                 </a:solidFill>
                 <a:latin typeface="Roboto"/>
               </a:rPr>
-              <a:t>Maintenance contracts brought in $40,500 this financial year to date, 22.0% on the same period last year (faster than the business as a whole, 3.5%), at a 59.5% gross margin (above the 36.8% overall).</a:t>
+              <a:t>Maintenance contracts brought in $45,350 this financial year to date, 21.9% on the same period last year (faster than the business as a whole, 3.4%), at a 63.9% gross margin (above the 43.4% overall).</a:t>
             </a:r>
           </a:p>
         </p:txBody>
@@ -7528,7 +7528,7 @@
                 </a:solidFill>
                 <a:latin typeface="Roboto"/>
               </a:rPr>
-              <a:t>Maintenance contracts: 59.5% gross margin, 24.5 points over the 35.0% target ($9,941 ahead on $40,500 this financial year to date).</a:t>
+              <a:t>Maintenance contracts: 63.9% gross margin, 28.9 points over the 35.0% target ($13,094 ahead on $45,350 this financial year to date).</a:t>
             </a:r>
           </a:p>
         </p:txBody>
@@ -7606,7 +7606,7 @@
                 </a:solidFill>
                 <a:latin typeface="Roboto"/>
               </a:rPr>
-              <a:t>Data retrieved 2pm, Tue 6 Oct 2026 · Generated 8 Oct 2026, 9:35am · Sample data · Made with Python (python-pptx)</a:t>
+              <a:t>Data retrieved 2pm, Tue 6 Oct 2026 · Generated 9 Oct 2026, 8:41am · Sample data · Made with Python (python-pptx)</a:t>
             </a:r>
           </a:p>
         </p:txBody>
@@ -7991,7 +7991,7 @@
                 </a:solidFill>
                 <a:latin typeface="Roboto"/>
               </a:rPr>
-              <a:t>$127,600 against $135,800</a:t>
+              <a:t>$143,000 against $152,100</a:t>
             </a:r>
           </a:p>
         </p:txBody>
@@ -8157,7 +8157,7 @@
                 </a:solidFill>
                 <a:latin typeface="Roboto"/>
               </a:rPr>
-              <a:t>$127,600 against $135,800</a:t>
+              <a:t>$143,000 against $152,100</a:t>
             </a:r>
           </a:p>
         </p:txBody>
@@ -8284,7 +8284,7 @@
                 </a:solidFill>
                 <a:latin typeface="Roboto"/>
               </a:rPr>
-              <a:t>28.3%</a:t>
+              <a:t>36.0%</a:t>
             </a:r>
           </a:p>
         </p:txBody>
@@ -8323,7 +8323,7 @@
                 </a:solidFill>
                 <a:latin typeface="Roboto"/>
               </a:rPr>
-              <a:t>$36,080 before overheads</a:t>
+              <a:t>$51,480 before overheads</a:t>
             </a:r>
           </a:p>
         </p:txBody>
@@ -8468,7 +8468,7 @@
                 </a:solidFill>
                 <a:latin typeface="Roboto"/>
               </a:rPr>
-              <a:t>Installations brought in $127,600 this financial year to date, (6.0%) on the same period last year (slower than the business as a whole, 3.5%), at a 28.3% gross margin (below the 36.8% overall).</a:t>
+              <a:t>Installations brought in $143,000 this financial year to date, (6.0%) on the same period last year (slower than the business as a whole, 3.4%), at a 36.0% gross margin (below the 43.4% overall).</a:t>
             </a:r>
           </a:p>
         </p:txBody>
@@ -8595,7 +8595,7 @@
                 </a:solidFill>
                 <a:latin typeface="Roboto"/>
               </a:rPr>
-              <a:t>Installations: 28.3% gross margin, 6.7 points under the 35.0% target: about $8,580 on $127,600 of revenue this financial year to date. It's below the 29.6% needed to cover overheads, too.</a:t>
+              <a:t>Installations: 36.0% gross margin, 1.0 points over the 35.0% target ($1,430 ahead on $143,000 this financial year to date).</a:t>
             </a:r>
           </a:p>
         </p:txBody>
@@ -8673,7 +8673,7 @@
                 </a:solidFill>
                 <a:latin typeface="Roboto"/>
               </a:rPr>
-              <a:t>Data retrieved 2pm, Tue 6 Oct 2026 · Generated 8 Oct 2026, 9:35am · Sample data · Made with Python (python-pptx)</a:t>
+              <a:t>Data retrieved 2pm, Tue 6 Oct 2026 · Generated 9 Oct 2026, 8:41am · Sample data · Made with Python (python-pptx)</a:t>
             </a:r>
           </a:p>
         </p:txBody>
@@ -9019,7 +9019,7 @@
                 </a:solidFill>
                 <a:latin typeface="Roboto"/>
               </a:rPr>
-              <a:t>41.6%</a:t>
+              <a:t>41.3%</a:t>
             </a:r>
           </a:p>
         </p:txBody>
@@ -9058,7 +9058,7 @@
                 </a:solidFill>
                 <a:latin typeface="Roboto"/>
               </a:rPr>
-              <a:t>$25,145 against $17,760</a:t>
+              <a:t>$27,260 against $19,288</a:t>
             </a:r>
           </a:p>
         </p:txBody>
@@ -9185,7 +9185,7 @@
                 </a:solidFill>
                 <a:latin typeface="Roboto"/>
               </a:rPr>
-              <a:t>41.6%</a:t>
+              <a:t>41.3%</a:t>
             </a:r>
           </a:p>
         </p:txBody>
@@ -9224,7 +9224,7 @@
                 </a:solidFill>
                 <a:latin typeface="Roboto"/>
               </a:rPr>
-              <a:t>$25,145 against $17,760</a:t>
+              <a:t>$27,260 against $19,288</a:t>
             </a:r>
           </a:p>
         </p:txBody>
@@ -9351,7 +9351,7 @@
                 </a:solidFill>
                 <a:latin typeface="Roboto"/>
               </a:rPr>
-              <a:t>43.4%</a:t>
+              <a:t>47.8%</a:t>
             </a:r>
           </a:p>
         </p:txBody>
@@ -9390,7 +9390,7 @@
                 </a:solidFill>
                 <a:latin typeface="Roboto"/>
               </a:rPr>
-              <a:t>$10,925 before overheads</a:t>
+              <a:t>$13,040 before overheads</a:t>
             </a:r>
           </a:p>
         </p:txBody>
@@ -9535,7 +9535,7 @@
                 </a:solidFill>
                 <a:latin typeface="Roboto"/>
               </a:rPr>
-              <a:t>Call-outs and repairs brought in $25,145 this financial year to date, 41.6% on the same period last year (faster than the business as a whole, 3.5%), at a 43.4% gross margin (above the 36.8% overall).</a:t>
+              <a:t>Call-outs and repairs brought in $27,260 this financial year to date, 41.3% on the same period last year (faster than the business as a whole, 3.4%), at a 47.8% gross margin (above the 43.4% overall).</a:t>
             </a:r>
           </a:p>
         </p:txBody>
@@ -9662,7 +9662,7 @@
                 </a:solidFill>
                 <a:latin typeface="Roboto"/>
               </a:rPr>
-              <a:t>Call-outs and repairs: 43.4% gross margin, 8.4 points over the 35.0% target ($2,124 ahead on $25,145 this financial year to date).</a:t>
+              <a:t>Call-outs and repairs: 47.8% gross margin, 12.8 points over the 35.0% target ($3,499 ahead on $27,260 this financial year to date).</a:t>
             </a:r>
           </a:p>
         </p:txBody>
@@ -9740,7 +9740,7 @@
                 </a:solidFill>
                 <a:latin typeface="Roboto"/>
               </a:rPr>
-              <a:t>Data retrieved 2pm, Tue 6 Oct 2026 · Generated 8 Oct 2026, 9:35am · Sample data · Made with Python (python-pptx)</a:t>
+              <a:t>Data retrieved 2pm, Tue 6 Oct 2026 · Generated 9 Oct 2026, 8:41am · Sample data · Made with Python (python-pptx)</a:t>
             </a:r>
           </a:p>
         </p:txBody>
@@ -9959,7 +9959,7 @@
                 </a:solidFill>
                 <a:latin typeface="Roboto"/>
               </a:rPr>
-              <a:t>From gross margin to profit: July's jobs made $71,121 gross margin (36.8%). Technician time not charged to jobs took ($2,214) and overheads $59,440, leaving $13,895 profit before tax (7.2% of revenue). To cover overheads, jobs need a 29.6% gross margin on average.</a:t>
+              <a:t>From gross margin to profit: July's jobs made $93,486 gross margin (43.4%). Technician time not charged to jobs took $26,391 and overheads $59,440, leaving $7,655 profit before tax (3.6% of revenue). To cover overheads, jobs need a 39.8% gross margin on average.</a:t>
             </a:r>
           </a:p>
         </p:txBody>
@@ -10190,7 +10190,7 @@
                           </a:solidFill>
                           <a:latin typeface="Roboto"/>
                         </a:rPr>
-                        <a:t>$40,500</a:t>
+                        <a:t>$45,350</a:t>
                       </a:r>
                     </a:p>
                   </a:txBody>
@@ -10217,7 +10217,7 @@
                           </a:solidFill>
                           <a:latin typeface="Roboto"/>
                         </a:rPr>
-                        <a:t>$33,200</a:t>
+                        <a:t>$37,200</a:t>
                       </a:r>
                     </a:p>
                   </a:txBody>
@@ -10244,7 +10244,7 @@
                           </a:solidFill>
                           <a:latin typeface="Roboto"/>
                         </a:rPr>
-                        <a:t>22.0%</a:t>
+                        <a:t>21.9%</a:t>
                       </a:r>
                     </a:p>
                   </a:txBody>
@@ -10271,7 +10271,7 @@
                           </a:solidFill>
                           <a:latin typeface="Roboto"/>
                         </a:rPr>
-                        <a:t>$24,116</a:t>
+                        <a:t>$28,966</a:t>
                       </a:r>
                     </a:p>
                   </a:txBody>
@@ -10298,7 +10298,7 @@
                           </a:solidFill>
                           <a:latin typeface="Roboto"/>
                         </a:rPr>
-                        <a:t>59.5%</a:t>
+                        <a:t>63.9%</a:t>
                       </a:r>
                     </a:p>
                   </a:txBody>
@@ -10354,7 +10354,7 @@
                           </a:solidFill>
                           <a:latin typeface="Roboto"/>
                         </a:rPr>
-                        <a:t>$127,600</a:t>
+                        <a:t>$143,000</a:t>
                       </a:r>
                     </a:p>
                   </a:txBody>
@@ -10381,7 +10381,7 @@
                           </a:solidFill>
                           <a:latin typeface="Roboto"/>
                         </a:rPr>
-                        <a:t>$135,800</a:t>
+                        <a:t>$152,100</a:t>
                       </a:r>
                     </a:p>
                   </a:txBody>
@@ -10435,7 +10435,7 @@
                           </a:solidFill>
                           <a:latin typeface="Roboto"/>
                         </a:rPr>
-                        <a:t>$36,080</a:t>
+                        <a:t>$51,480</a:t>
                       </a:r>
                     </a:p>
                   </a:txBody>
@@ -10462,7 +10462,7 @@
                           </a:solidFill>
                           <a:latin typeface="Roboto"/>
                         </a:rPr>
-                        <a:t>28.3%</a:t>
+                        <a:t>36.0%</a:t>
                       </a:r>
                     </a:p>
                   </a:txBody>
@@ -10518,7 +10518,7 @@
                           </a:solidFill>
                           <a:latin typeface="Roboto"/>
                         </a:rPr>
-                        <a:t>$25,145</a:t>
+                        <a:t>$27,260</a:t>
                       </a:r>
                     </a:p>
                   </a:txBody>
@@ -10545,7 +10545,7 @@
                           </a:solidFill>
                           <a:latin typeface="Roboto"/>
                         </a:rPr>
-                        <a:t>$17,760</a:t>
+                        <a:t>$19,288</a:t>
                       </a:r>
                     </a:p>
                   </a:txBody>
@@ -10572,7 +10572,7 @@
                           </a:solidFill>
                           <a:latin typeface="Roboto"/>
                         </a:rPr>
-                        <a:t>41.6%</a:t>
+                        <a:t>41.3%</a:t>
                       </a:r>
                     </a:p>
                   </a:txBody>
@@ -10599,7 +10599,7 @@
                           </a:solidFill>
                           <a:latin typeface="Roboto"/>
                         </a:rPr>
-                        <a:t>$10,925</a:t>
+                        <a:t>$13,040</a:t>
                       </a:r>
                     </a:p>
                   </a:txBody>
@@ -10626,7 +10626,7 @@
                           </a:solidFill>
                           <a:latin typeface="Roboto"/>
                         </a:rPr>
-                        <a:t>43.4%</a:t>
+                        <a:t>47.8%</a:t>
                       </a:r>
                     </a:p>
                   </a:txBody>
@@ -10682,7 +10682,7 @@
                           </a:solidFill>
                           <a:latin typeface="Roboto"/>
                         </a:rPr>
-                        <a:t>$193,245</a:t>
+                        <a:t>$215,610</a:t>
                       </a:r>
                     </a:p>
                   </a:txBody>
@@ -10709,7 +10709,7 @@
                           </a:solidFill>
                           <a:latin typeface="Roboto"/>
                         </a:rPr>
-                        <a:t>$186,760</a:t>
+                        <a:t>$208,588</a:t>
                       </a:r>
                     </a:p>
                   </a:txBody>
@@ -10736,7 +10736,7 @@
                           </a:solidFill>
                           <a:latin typeface="Roboto"/>
                         </a:rPr>
-                        <a:t>3.5%</a:t>
+                        <a:t>3.4%</a:t>
                       </a:r>
                     </a:p>
                   </a:txBody>
@@ -10763,7 +10763,7 @@
                           </a:solidFill>
                           <a:latin typeface="Roboto"/>
                         </a:rPr>
-                        <a:t>$71,121</a:t>
+                        <a:t>$93,486</a:t>
                       </a:r>
                     </a:p>
                   </a:txBody>
@@ -10790,7 +10790,7 @@
                           </a:solidFill>
                           <a:latin typeface="Roboto"/>
                         </a:rPr>
-                        <a:t>36.8%</a:t>
+                        <a:t>43.4%</a:t>
                       </a:r>
                     </a:p>
                   </a:txBody>
@@ -10878,7 +10878,7 @@
                 </a:solidFill>
                 <a:latin typeface="Roboto"/>
               </a:rPr>
-              <a:t>Data retrieved 2pm, Tue 6 Oct 2026 · Generated 8 Oct 2026, 9:35am · Sample data · Made with Python (python-pptx)</a:t>
+              <a:t>Data retrieved 2pm, Tue 6 Oct 2026 · Generated 9 Oct 2026, 8:41am · Sample data · Made with Python (python-pptx)</a:t>
             </a:r>
           </a:p>
         </p:txBody>
